--- a/First Assignment/Assignment_1.pptx
+++ b/First Assignment/Assignment_1.pptx
@@ -215,7 +215,7 @@
           <a:p>
             <a:fld id="{D385E600-56B4-46C7-9B0A-9CD7422AE937}" type="datetimeFigureOut">
               <a:rPr lang="it-IT" smtClean="0"/>
-              <a:t>05/04/2026</a:t>
+              <a:t>07/04/2026</a:t>
             </a:fld>
             <a:endParaRPr lang="it-IT"/>
           </a:p>
@@ -629,7 +629,7 @@
           <a:p>
             <a:fld id="{76A3598E-AD3F-4717-88B8-E163AC0105A1}" type="datetimeFigureOut">
               <a:rPr lang="it-IT" smtClean="0"/>
-              <a:t>05/04/2026</a:t>
+              <a:t>07/04/2026</a:t>
             </a:fld>
             <a:endParaRPr lang="it-IT"/>
           </a:p>
@@ -827,7 +827,7 @@
           <a:p>
             <a:fld id="{76A3598E-AD3F-4717-88B8-E163AC0105A1}" type="datetimeFigureOut">
               <a:rPr lang="it-IT" smtClean="0"/>
-              <a:t>05/04/2026</a:t>
+              <a:t>07/04/2026</a:t>
             </a:fld>
             <a:endParaRPr lang="it-IT"/>
           </a:p>
@@ -1035,7 +1035,7 @@
           <a:p>
             <a:fld id="{76A3598E-AD3F-4717-88B8-E163AC0105A1}" type="datetimeFigureOut">
               <a:rPr lang="it-IT" smtClean="0"/>
-              <a:t>05/04/2026</a:t>
+              <a:t>07/04/2026</a:t>
             </a:fld>
             <a:endParaRPr lang="it-IT"/>
           </a:p>
@@ -1233,7 +1233,7 @@
           <a:p>
             <a:fld id="{76A3598E-AD3F-4717-88B8-E163AC0105A1}" type="datetimeFigureOut">
               <a:rPr lang="it-IT" smtClean="0"/>
-              <a:t>05/04/2026</a:t>
+              <a:t>07/04/2026</a:t>
             </a:fld>
             <a:endParaRPr lang="it-IT"/>
           </a:p>
@@ -1508,7 +1508,7 @@
           <a:p>
             <a:fld id="{76A3598E-AD3F-4717-88B8-E163AC0105A1}" type="datetimeFigureOut">
               <a:rPr lang="it-IT" smtClean="0"/>
-              <a:t>05/04/2026</a:t>
+              <a:t>07/04/2026</a:t>
             </a:fld>
             <a:endParaRPr lang="it-IT"/>
           </a:p>
@@ -1773,7 +1773,7 @@
           <a:p>
             <a:fld id="{76A3598E-AD3F-4717-88B8-E163AC0105A1}" type="datetimeFigureOut">
               <a:rPr lang="it-IT" smtClean="0"/>
-              <a:t>05/04/2026</a:t>
+              <a:t>07/04/2026</a:t>
             </a:fld>
             <a:endParaRPr lang="it-IT"/>
           </a:p>
@@ -2185,7 +2185,7 @@
           <a:p>
             <a:fld id="{76A3598E-AD3F-4717-88B8-E163AC0105A1}" type="datetimeFigureOut">
               <a:rPr lang="it-IT" smtClean="0"/>
-              <a:t>05/04/2026</a:t>
+              <a:t>07/04/2026</a:t>
             </a:fld>
             <a:endParaRPr lang="it-IT"/>
           </a:p>
@@ -2326,7 +2326,7 @@
           <a:p>
             <a:fld id="{76A3598E-AD3F-4717-88B8-E163AC0105A1}" type="datetimeFigureOut">
               <a:rPr lang="it-IT" smtClean="0"/>
-              <a:t>05/04/2026</a:t>
+              <a:t>07/04/2026</a:t>
             </a:fld>
             <a:endParaRPr lang="it-IT"/>
           </a:p>
@@ -2439,7 +2439,7 @@
           <a:p>
             <a:fld id="{76A3598E-AD3F-4717-88B8-E163AC0105A1}" type="datetimeFigureOut">
               <a:rPr lang="it-IT" smtClean="0"/>
-              <a:t>05/04/2026</a:t>
+              <a:t>07/04/2026</a:t>
             </a:fld>
             <a:endParaRPr lang="it-IT"/>
           </a:p>
@@ -2750,7 +2750,7 @@
           <a:p>
             <a:fld id="{76A3598E-AD3F-4717-88B8-E163AC0105A1}" type="datetimeFigureOut">
               <a:rPr lang="it-IT" smtClean="0"/>
-              <a:t>05/04/2026</a:t>
+              <a:t>07/04/2026</a:t>
             </a:fld>
             <a:endParaRPr lang="it-IT"/>
           </a:p>
@@ -3038,7 +3038,7 @@
           <a:p>
             <a:fld id="{76A3598E-AD3F-4717-88B8-E163AC0105A1}" type="datetimeFigureOut">
               <a:rPr lang="it-IT" smtClean="0"/>
-              <a:t>05/04/2026</a:t>
+              <a:t>07/04/2026</a:t>
             </a:fld>
             <a:endParaRPr lang="it-IT"/>
           </a:p>
@@ -3279,7 +3279,7 @@
           <a:p>
             <a:fld id="{76A3598E-AD3F-4717-88B8-E163AC0105A1}" type="datetimeFigureOut">
               <a:rPr lang="it-IT" smtClean="0"/>
-              <a:t>05/04/2026</a:t>
+              <a:t>07/04/2026</a:t>
             </a:fld>
             <a:endParaRPr lang="it-IT"/>
           </a:p>
@@ -3721,7 +3721,7 @@
           </a:ln>
           <a:extLst>
             <a:ext uri="{C572A759-6A51-4108-AA02-DFA0A04FC94B}">
-              <ma14:wrappingTextBoxFlag xmlns="" xmlns:m="http://schemas.openxmlformats.org/officeDocument/2006/math" xmlns:a14="http://schemas.microsoft.com/office/drawing/2010/main" xmlns:ma14="http://schemas.microsoft.com/office/mac/drawingml/2011/main" val="1"/>
+              <ma14:wrappingTextBoxFlag xmlns:ma14="http://schemas.microsoft.com/office/mac/drawingml/2011/main" xmlns:a14="http://schemas.microsoft.com/office/drawing/2010/main" xmlns:m="http://schemas.openxmlformats.org/officeDocument/2006/math" xmlns="" val="1"/>
             </a:ext>
           </a:extLst>
         </p:spPr>
@@ -3747,18 +3747,13 @@
           </a:lstStyle>
           <a:p>
             <a:r>
-              <a:rPr lang="it-IT" sz="4000" noProof="0" dirty="0"/>
-              <a:t>Assignment 1</a:t>
+              <a:rPr lang="it-IT" sz="4000" dirty="0"/>
+              <a:t>Assignment 1 – Computer Vision
+Multimodal Image </a:t>
             </a:r>
             <a:r>
-              <a:rPr lang="it-IT" sz="4000" dirty="0"/>
-              <a:t> – Visione Artificiale</a:t>
-            </a:r>
-          </a:p>
-          <a:p>
-            <a:r>
-              <a:rPr lang="it-IT" sz="4000" dirty="0"/>
-              <a:t>Registrazione di Immagini Multimodali</a:t>
+              <a:rPr lang="it-IT" sz="4000" dirty="0" err="1"/>
+              <a:t>Registration</a:t>
             </a:r>
             <a:endParaRPr lang="it-IT" sz="4000" noProof="0" dirty="0"/>
           </a:p>
@@ -3789,7 +3784,7 @@
           </a:ln>
           <a:extLst>
             <a:ext uri="{C572A759-6A51-4108-AA02-DFA0A04FC94B}">
-              <ma14:wrappingTextBoxFlag xmlns="" xmlns:m="http://schemas.openxmlformats.org/officeDocument/2006/math" xmlns:a14="http://schemas.microsoft.com/office/drawing/2010/main" xmlns:ma14="http://schemas.microsoft.com/office/mac/drawingml/2011/main" val="1"/>
+              <ma14:wrappingTextBoxFlag xmlns:ma14="http://schemas.microsoft.com/office/mac/drawingml/2011/main" xmlns:a14="http://schemas.microsoft.com/office/drawing/2010/main" xmlns:m="http://schemas.openxmlformats.org/officeDocument/2006/math" xmlns="" val="1"/>
             </a:ext>
           </a:extLst>
         </p:spPr>
@@ -3824,8 +3819,8 @@
           </a:p>
         </p:txBody>
       </p:sp>
-      <mc:AlternateContent xmlns:mc="http://schemas.openxmlformats.org/markup-compatibility/2006" xmlns:a14="http://schemas.microsoft.com/office/drawing/2010/main">
-        <mc:Choice Requires="a14">
+      <mc:AlternateContent xmlns:mc="http://schemas.openxmlformats.org/markup-compatibility/2006">
+        <mc:Choice xmlns:a14="http://schemas.microsoft.com/office/drawing/2010/main" Requires="a14">
           <p:sp>
             <p:nvSpPr>
               <p:cNvPr id="5" name="CasellaDiTesto 4">
@@ -3865,25 +3860,13 @@
                   <a:buChar char="o"/>
                 </a:pPr>
                 <a:r>
-                  <a:rPr lang="it-IT" dirty="0"/>
-                  <a:t>Sviluppare un sistema completo per la registrazione di immagini multimodali acquisite da sensori differenti.</a:t>
+                  <a:rPr lang="en-US" dirty="0"/>
+                  <a:t>Develop a complete system for recording multimodal images acquired by different sensors.
+Estimate a geometric transformation (roto-translation with three parameters) between pairs of images maximizing the Mutual Information.</a:t>
                 </a:r>
-              </a:p>
-              <a:p>
-                <a:pPr marL="285750" indent="-285750">
-                  <a:lnSpc>
-                    <a:spcPct val="107000"/>
-                  </a:lnSpc>
-                  <a:spcAft>
-                    <a:spcPts val="800"/>
-                  </a:spcAft>
-                  <a:buFont typeface="Courier New" panose="02070309020205020404" pitchFamily="49" charset="0"/>
-                  <a:buChar char="o"/>
-                </a:pPr>
-                <a:r>
-                  <a:rPr lang="it-IT" dirty="0"/>
-                  <a:t>Stimare una trasformazione geometrica (roto-traslazione con tre parametri) tra coppie di immagini massimizzando la Mutua Informazione.</a:t>
-                </a:r>
+                <a:endParaRPr lang="en-US" i="1" dirty="0">
+                  <a:latin typeface="Cambria Math" panose="02040503050406030204" pitchFamily="18" charset="0"/>
+                </a:endParaRPr>
               </a:p>
               <a:p>
                 <a:pPr algn="ctr">
@@ -4093,8 +4076,8 @@
                   <a:buChar char="o"/>
                 </a:pPr>
                 <a:r>
-                  <a:rPr lang="it-IT" dirty="0"/>
-                  <a:t>Determinare i valori degli iperparametri che producono, in media, la configurazione migliore: </a:t>
+                  <a:rPr lang="en-US" dirty="0"/>
+                  <a:t>Determine the hyperparameter values that produce, on average, the best configuration:</a:t>
                 </a:r>
               </a:p>
               <a:p>
@@ -4110,7 +4093,7 @@
                 </a:pPr>
                 <a:r>
                   <a:rPr lang="it-IT" dirty="0"/>
-                  <a:t>numero di bin (obbligatorio)</a:t>
+                  <a:t>Number of bins (required)</a:t>
                 </a:r>
               </a:p>
               <a:p>
@@ -4126,13 +4109,13 @@
                 </a:pPr>
                 <a:r>
                   <a:rPr lang="it-IT" dirty="0"/>
-                  <a:t>miglior algoritmo di ottimizzazione (opzionale)</a:t>
+                  <a:t>Best optimization algorithm (optional)</a:t>
                 </a:r>
               </a:p>
             </p:txBody>
           </p:sp>
         </mc:Choice>
-        <mc:Fallback xmlns="">
+        <mc:Fallback>
           <p:sp>
             <p:nvSpPr>
               <p:cNvPr id="5" name="CasellaDiTesto 4">
@@ -4202,7 +4185,7 @@
           </a:ln>
           <a:extLst>
             <a:ext uri="{C572A759-6A51-4108-AA02-DFA0A04FC94B}">
-              <ma14:wrappingTextBoxFlag xmlns="" xmlns:m="http://schemas.openxmlformats.org/officeDocument/2006/math" xmlns:a14="http://schemas.microsoft.com/office/drawing/2010/main" xmlns:ma14="http://schemas.microsoft.com/office/mac/drawingml/2011/main" val="1"/>
+              <ma14:wrappingTextBoxFlag xmlns:ma14="http://schemas.microsoft.com/office/mac/drawingml/2011/main" xmlns:a14="http://schemas.microsoft.com/office/drawing/2010/main" xmlns:m="http://schemas.openxmlformats.org/officeDocument/2006/math" xmlns="" val="1"/>
             </a:ext>
           </a:extLst>
         </p:spPr>
@@ -4228,9 +4211,10 @@
           </a:lstStyle>
           <a:p>
             <a:r>
-              <a:rPr lang="it-IT" sz="2800" b="0" noProof="0" dirty="0"/>
-              <a:t>Obiettivi</a:t>
+              <a:rPr lang="it-IT" sz="2800" b="0"/>
+              <a:t>Objectives</a:t>
             </a:r>
+            <a:endParaRPr lang="it-IT" sz="2800" b="0" noProof="0" dirty="0"/>
           </a:p>
         </p:txBody>
       </p:sp>
@@ -4249,7 +4233,7 @@
         <p:spPr>
           <a:xfrm>
             <a:off x="394076" y="5562690"/>
-            <a:ext cx="11403839" cy="971292"/>
+            <a:ext cx="11403839" cy="674928"/>
           </a:xfrm>
           <a:prstGeom prst="rect">
             <a:avLst/>
@@ -4273,9 +4257,10 @@
               <a:buChar char="o"/>
             </a:pPr>
             <a:r>
-              <a:rPr lang="it-IT" dirty="0"/>
-              <a:t>L’insieme dei dati è suddiviso in validation e test set, in ognuno si hanno a disposizione otto coppie di immagini provenienti da acquisizioni satellitari. Inoltre, le coppie di ciascun set sono caratterizzate da un disallineamento progressivo.</a:t>
+              <a:rPr lang="en-US" dirty="0"/>
+              <a:t>The set of data is divided into validation and test sets, in each of which eight pairs of images from satellite acquisitions are available. In addition, the pairs in each set are characterized by progressive misalignment.</a:t>
             </a:r>
+            <a:endParaRPr lang="it-IT" dirty="0"/>
           </a:p>
         </p:txBody>
       </p:sp>
@@ -4304,7 +4289,7 @@
           </a:ln>
           <a:extLst>
             <a:ext uri="{C572A759-6A51-4108-AA02-DFA0A04FC94B}">
-              <ma14:wrappingTextBoxFlag xmlns="" xmlns:m="http://schemas.openxmlformats.org/officeDocument/2006/math" xmlns:a14="http://schemas.microsoft.com/office/drawing/2010/main" xmlns:ma14="http://schemas.microsoft.com/office/mac/drawingml/2011/main" val="1"/>
+              <ma14:wrappingTextBoxFlag xmlns:ma14="http://schemas.microsoft.com/office/mac/drawingml/2011/main" xmlns:a14="http://schemas.microsoft.com/office/drawing/2010/main" xmlns:m="http://schemas.openxmlformats.org/officeDocument/2006/math" xmlns="" val="1"/>
             </a:ext>
           </a:extLst>
         </p:spPr>
@@ -4469,7 +4454,7 @@
           </a:ln>
           <a:extLst>
             <a:ext uri="{C572A759-6A51-4108-AA02-DFA0A04FC94B}">
-              <ma14:wrappingTextBoxFlag xmlns="" xmlns:m="http://schemas.openxmlformats.org/officeDocument/2006/math" xmlns:a14="http://schemas.microsoft.com/office/drawing/2010/main" xmlns:ma14="http://schemas.microsoft.com/office/mac/drawingml/2011/main" val="1"/>
+              <ma14:wrappingTextBoxFlag xmlns:ma14="http://schemas.microsoft.com/office/mac/drawingml/2011/main" xmlns:a14="http://schemas.microsoft.com/office/drawing/2010/main" xmlns:m="http://schemas.openxmlformats.org/officeDocument/2006/math" xmlns="" val="1"/>
             </a:ext>
           </a:extLst>
         </p:spPr>
@@ -4495,8 +4480,8 @@
           </a:lstStyle>
           <a:p>
             <a:r>
-              <a:rPr lang="it-IT" sz="4067" dirty="0"/>
-              <a:t>Performance sul test set</a:t>
+              <a:rPr lang="en-US" sz="4067"/>
+              <a:t>Performance on the test set</a:t>
             </a:r>
             <a:endParaRPr lang="it-IT" sz="4067" noProof="0" dirty="0"/>
           </a:p>
@@ -4517,7 +4502,7 @@
         <p:spPr>
           <a:xfrm>
             <a:off x="2274444" y="4969743"/>
-            <a:ext cx="1722035" cy="394532"/>
+            <a:ext cx="1722035" cy="707373"/>
           </a:xfrm>
           <a:prstGeom prst="rect">
             <a:avLst/>
@@ -4539,10 +4524,10 @@
               </a:spcAft>
             </a:pPr>
             <a:r>
-              <a:rPr lang="it-IT" sz="1900" kern="100" dirty="0">
+              <a:rPr lang="it-IT" sz="1900" kern="100">
                 <a:cs typeface="Arial" panose="020B0604020202020204" pitchFamily="34" charset="0"/>
               </a:rPr>
-              <a:t>Risultati medi</a:t>
+              <a:t>Average results</a:t>
             </a:r>
             <a:endParaRPr lang="it-IT" sz="1900" kern="100" noProof="0" dirty="0">
               <a:cs typeface="Arial" panose="020B0604020202020204" pitchFamily="34" charset="0"/>
@@ -6189,8 +6174,8 @@
         </p:nvSpPr>
         <p:spPr>
           <a:xfrm>
-            <a:off x="0" y="1099193"/>
-            <a:ext cx="6381132" cy="394532"/>
+            <a:off x="-1" y="1099193"/>
+            <a:ext cx="7639051" cy="346826"/>
           </a:xfrm>
           <a:prstGeom prst="rect">
             <a:avLst/>
@@ -6212,18 +6197,12 @@
               </a:spcAft>
             </a:pPr>
             <a:r>
-              <a:rPr lang="it-IT" sz="1900" kern="100" noProof="0" dirty="0">
+              <a:rPr lang="en-US" sz="1600" kern="100" dirty="0">
                 <a:cs typeface="Arial" panose="020B0604020202020204" pitchFamily="34" charset="0"/>
               </a:rPr>
-              <a:t>L’unit</a:t>
+              <a:t>The unit of measurement is pixels for tx and ty, while radians for theta.</a:t>
             </a:r>
-            <a:r>
-              <a:rPr lang="it-IT" sz="1900" kern="100" dirty="0">
-                <a:cs typeface="Arial" panose="020B0604020202020204" pitchFamily="34" charset="0"/>
-              </a:rPr>
-              <a:t>à di misura è pixel per tx e ty, mentre radianti per theta.</a:t>
-            </a:r>
-            <a:endParaRPr lang="it-IT" sz="1900" kern="100" noProof="0" dirty="0">
+            <a:endParaRPr lang="it-IT" sz="1600" kern="100" noProof="0" dirty="0">
               <a:cs typeface="Arial" panose="020B0604020202020204" pitchFamily="34" charset="0"/>
             </a:endParaRPr>
           </a:p>
@@ -6324,10 +6303,10 @@
               </a:spcAft>
             </a:pPr>
             <a:r>
-              <a:rPr lang="it-IT" sz="1400" kern="100" dirty="0">
+              <a:rPr lang="it-IT" sz="1400" kern="100">
                 <a:cs typeface="Arial" panose="020B0604020202020204" pitchFamily="34" charset="0"/>
               </a:rPr>
-              <a:t>Risultato migliore: coppia c1</a:t>
+              <a:t>Best result: pair c1</a:t>
             </a:r>
             <a:endParaRPr lang="it-IT" sz="1400" kern="100" noProof="0" dirty="0">
               <a:cs typeface="Arial" panose="020B0604020202020204" pitchFamily="34" charset="0"/>
@@ -6372,10 +6351,10 @@
               </a:spcAft>
             </a:pPr>
             <a:r>
-              <a:rPr lang="it-IT" sz="1400" kern="100" dirty="0">
+              <a:rPr lang="it-IT" sz="1400" kern="100">
                 <a:cs typeface="Arial" panose="020B0604020202020204" pitchFamily="34" charset="0"/>
               </a:rPr>
-              <a:t>Risultato peggiore: coppia c8</a:t>
+              <a:t>Worst result: c8 pair</a:t>
             </a:r>
             <a:endParaRPr lang="it-IT" sz="1400" kern="100" noProof="0" dirty="0">
               <a:cs typeface="Arial" panose="020B0604020202020204" pitchFamily="34" charset="0"/>
@@ -6444,7 +6423,7 @@
           </a:ln>
           <a:extLst>
             <a:ext uri="{C572A759-6A51-4108-AA02-DFA0A04FC94B}">
-              <ma14:wrappingTextBoxFlag xmlns="" xmlns:m="http://schemas.openxmlformats.org/officeDocument/2006/math" xmlns:a14="http://schemas.microsoft.com/office/drawing/2010/main" xmlns:ma14="http://schemas.microsoft.com/office/mac/drawingml/2011/main" val="1"/>
+              <ma14:wrappingTextBoxFlag xmlns:ma14="http://schemas.microsoft.com/office/mac/drawingml/2011/main" xmlns:a14="http://schemas.microsoft.com/office/drawing/2010/main" xmlns:m="http://schemas.openxmlformats.org/officeDocument/2006/math" xmlns="" val="1"/>
             </a:ext>
           </a:extLst>
         </p:spPr>
@@ -6470,8 +6449,8 @@
           </a:lstStyle>
           <a:p>
             <a:r>
-              <a:rPr lang="it-IT" sz="4067" dirty="0"/>
-              <a:t>Bibliografia</a:t>
+              <a:rPr lang="it-IT" sz="4067"/>
+              <a:t>Bibliography</a:t>
             </a:r>
             <a:endParaRPr lang="it-IT" sz="4067" noProof="0" dirty="0"/>
           </a:p>
@@ -6591,7 +6570,7 @@
           </a:ln>
           <a:extLst>
             <a:ext uri="{C572A759-6A51-4108-AA02-DFA0A04FC94B}">
-              <ma14:wrappingTextBoxFlag xmlns="" xmlns:m="http://schemas.openxmlformats.org/officeDocument/2006/math" xmlns:a14="http://schemas.microsoft.com/office/drawing/2010/main" xmlns:ma14="http://schemas.microsoft.com/office/mac/drawingml/2011/main" val="1"/>
+              <ma14:wrappingTextBoxFlag xmlns:ma14="http://schemas.microsoft.com/office/mac/drawingml/2011/main" xmlns:a14="http://schemas.microsoft.com/office/drawing/2010/main" xmlns:m="http://schemas.openxmlformats.org/officeDocument/2006/math" xmlns="" val="1"/>
             </a:ext>
           </a:extLst>
         </p:spPr>
@@ -6653,7 +6632,7 @@
           <a:p>
             <a:r>
               <a:rPr lang="en-US" dirty="0"/>
-              <a:t>Modelli generativi come Gemini e Claude sono stati utilizzati per:</a:t>
+              <a:t>Generative models such as Gemini and Claude have been used to:</a:t>
             </a:r>
           </a:p>
           <a:p>
@@ -6663,7 +6642,7 @@
             </a:pPr>
             <a:r>
               <a:rPr lang="en-US" dirty="0"/>
-              <a:t>Realizzazione delle parti di codice che coinvolge la libreria matplotlib</a:t>
+              <a:t>Realization of the parts of code involving the matplotlib library</a:t>
             </a:r>
           </a:p>
           <a:p>
@@ -6673,20 +6652,17 @@
             </a:pPr>
             <a:r>
               <a:rPr lang="en-US" dirty="0"/>
-              <a:t>Interagire velocemente con la documentazione delle librerie</a:t>
+              <a:t>Quickly interact with library documentation</a:t>
             </a:r>
           </a:p>
           <a:p>
-            <a:pPr marL="742950" lvl="1" indent="-285750">
-              <a:buFont typeface="Wingdings" panose="05000000000000000000" pitchFamily="2" charset="2"/>
-              <a:buChar char="§"/>
-            </a:pPr>
+            <a:pPr lvl="1"/>
             <a:endParaRPr lang="en-US" dirty="0"/>
           </a:p>
           <a:p>
             <a:r>
               <a:rPr lang="en-US" dirty="0"/>
-              <a:t>Il motore di ricerca Perplexity è stato utilizzato per reperire ed analizzare paper scientifici, è stato utile soprattutto per comprendere come materializzare alcuni spunti scientifici in codice Python.</a:t>
+              <a:t>The Perplexity search engine has been used to find and analyze scientific papers, it has been useful above all to understand how to materialize some scientific ideas in Python code.</a:t>
             </a:r>
           </a:p>
         </p:txBody>
@@ -7700,7 +7676,7 @@
           </a:ln>
           <a:extLst>
             <a:ext uri="{C572A759-6A51-4108-AA02-DFA0A04FC94B}">
-              <ma14:wrappingTextBoxFlag xmlns="" xmlns:m="http://schemas.openxmlformats.org/officeDocument/2006/math" xmlns:a14="http://schemas.microsoft.com/office/drawing/2010/main" xmlns:ma14="http://schemas.microsoft.com/office/mac/drawingml/2011/main" val="1"/>
+              <ma14:wrappingTextBoxFlag xmlns:ma14="http://schemas.microsoft.com/office/mac/drawingml/2011/main" xmlns:a14="http://schemas.microsoft.com/office/drawing/2010/main" xmlns:m="http://schemas.openxmlformats.org/officeDocument/2006/math" xmlns="" val="1"/>
             </a:ext>
           </a:extLst>
         </p:spPr>
@@ -7726,8 +7702,8 @@
           </a:lstStyle>
           <a:p>
             <a:r>
-              <a:rPr lang="it-IT" sz="4067" dirty="0"/>
-              <a:t>Introduzione</a:t>
+              <a:rPr lang="it-IT" sz="4067"/>
+              <a:t>Introduction</a:t>
             </a:r>
             <a:endParaRPr lang="it-IT" sz="4067" noProof="0" dirty="0"/>
           </a:p>
@@ -7772,26 +7748,29 @@
               <a:buChar char="o"/>
             </a:pPr>
             <a:r>
-              <a:rPr lang="it-IT" sz="1900" kern="100" dirty="0">
+              <a:rPr lang="en-US" sz="1900" kern="100" dirty="0">
                 <a:cs typeface="Arial" panose="020B0604020202020204" pitchFamily="34" charset="0"/>
               </a:rPr>
-              <a:t>La registrazione consiste nel determinare una trasformazione geometrica che allinea punti corrispondenti di due immagini</a:t>
+              <a:t>Registration consists of determining a geometric transformation that aligns corresponding points of two images[1]. 
+Given the different nature of the images to be analyzed, as they are acquired by different sensors, it is not possible to resort to feature-based methods.
+The idea is to establish a certain criterion of similarity between reference and moving images, i.e. the one transformed according to T. The criterion chosen is Mutual Information, which is based on the concept of entropy and is therefore directly linked to probability.</a:t>
             </a:r>
-            <a:r>
-              <a:rPr lang="it-IT" sz="1900" kern="100" baseline="30000" dirty="0">
-                <a:cs typeface="Arial" panose="020B0604020202020204" pitchFamily="34" charset="0"/>
-              </a:rPr>
-              <a:t>[1]</a:t>
-            </a:r>
-            <a:r>
-              <a:rPr lang="it-IT" sz="1900" kern="100" dirty="0">
-                <a:cs typeface="Arial" panose="020B0604020202020204" pitchFamily="34" charset="0"/>
-              </a:rPr>
-              <a:t>. </a:t>
-            </a:r>
-          </a:p>
-          <a:p>
-            <a:pPr marL="285750" indent="-285750">
+          </a:p>
+          <a:p>
+            <a:pPr>
+              <a:lnSpc>
+                <a:spcPct val="107000"/>
+              </a:lnSpc>
+              <a:spcAft>
+                <a:spcPts val="800"/>
+              </a:spcAft>
+            </a:pPr>
+            <a:endParaRPr lang="en-US" sz="1900" kern="100" dirty="0">
+              <a:cs typeface="Arial" panose="020B0604020202020204" pitchFamily="34" charset="0"/>
+            </a:endParaRPr>
+          </a:p>
+          <a:p>
+            <a:pPr marL="342900" indent="-342900">
               <a:lnSpc>
                 <a:spcPct val="107000"/>
               </a:lnSpc>
@@ -7802,98 +7781,16 @@
               <a:buChar char="o"/>
             </a:pPr>
             <a:r>
-              <a:rPr lang="it-IT" sz="1900" kern="100" dirty="0">
+              <a:rPr lang="en-US" sz="1900" kern="100" dirty="0">
                 <a:cs typeface="Arial" panose="020B0604020202020204" pitchFamily="34" charset="0"/>
               </a:rPr>
-              <a:t>Vista la natura differente delle immagini da analizzare, in quanto acquisite da sensori differenti, non è possibile ricorrere ai metodi basati su features.</a:t>
+              <a:t>First, a 2D histogram is constructed, then the number of bins with which to divide the intensity range (0-255) is established, and we assume it is the same for both axes. Each bin represents a range of intensity.
+Then the pixels are analyzed in terms of indices of both images, and the pair (intensità_pixel_ref, intensità_pixel_mov) is obtained. The 2D histogram will then be a grid whose cells represent the absolute frequency, i.e. how many times this pair has occurred.
+Starting from the absolute frequencies, the relative frequencies are calculated, which in fact provide an estimate of the probability corresponding to the pair. Finally, the Mutual Information is calculated.</a:t>
             </a:r>
-          </a:p>
-          <a:p>
-            <a:pPr marL="285750" indent="-285750">
-              <a:lnSpc>
-                <a:spcPct val="107000"/>
-              </a:lnSpc>
-              <a:spcAft>
-                <a:spcPts val="800"/>
-              </a:spcAft>
-              <a:buFont typeface="Courier New" panose="02070309020205020404" pitchFamily="49" charset="0"/>
-              <a:buChar char="o"/>
-            </a:pPr>
-            <a:r>
-              <a:rPr lang="it-IT" sz="1900" kern="100" dirty="0">
-                <a:cs typeface="Arial" panose="020B0604020202020204" pitchFamily="34" charset="0"/>
-              </a:rPr>
-              <a:t>L’idea è stabilire un certo criterio di similarità tra immagine reference e moving, ossia quella trasformata in base a T. Il criterio scelto è la Mutua Informazione che si basa sul concetto di entropia e che quindi è direttamente collegata alla probabilità.</a:t>
-            </a:r>
-          </a:p>
-          <a:p>
-            <a:pPr marL="285750" indent="-285750">
-              <a:lnSpc>
-                <a:spcPct val="107000"/>
-              </a:lnSpc>
-              <a:spcAft>
-                <a:spcPts val="800"/>
-              </a:spcAft>
-              <a:buFont typeface="Courier New" panose="02070309020205020404" pitchFamily="49" charset="0"/>
-              <a:buChar char="o"/>
-            </a:pPr>
             <a:endParaRPr lang="it-IT" sz="1900" kern="100" dirty="0">
               <a:cs typeface="Arial" panose="020B0604020202020204" pitchFamily="34" charset="0"/>
             </a:endParaRPr>
-          </a:p>
-          <a:p>
-            <a:pPr marL="285750" indent="-285750">
-              <a:lnSpc>
-                <a:spcPct val="107000"/>
-              </a:lnSpc>
-              <a:spcAft>
-                <a:spcPts val="800"/>
-              </a:spcAft>
-              <a:buFont typeface="Courier New" panose="02070309020205020404" pitchFamily="49" charset="0"/>
-              <a:buChar char="o"/>
-            </a:pPr>
-            <a:r>
-              <a:rPr lang="it-IT" sz="1900" kern="100" dirty="0">
-                <a:cs typeface="Arial" panose="020B0604020202020204" pitchFamily="34" charset="0"/>
-              </a:rPr>
-              <a:t>Dapprima si costruisce un istogramma 2D, quindi si stabilisce il numero di bin con cui suddividere il range di intensità (0-255) e supponiamo sia lo stesso per entrambi gli assi. Ogni bin rappresenta un intervallo di intensità.</a:t>
-            </a:r>
-          </a:p>
-          <a:p>
-            <a:pPr marL="285750" indent="-285750">
-              <a:lnSpc>
-                <a:spcPct val="107000"/>
-              </a:lnSpc>
-              <a:spcAft>
-                <a:spcPts val="800"/>
-              </a:spcAft>
-              <a:buFont typeface="Courier New" panose="02070309020205020404" pitchFamily="49" charset="0"/>
-              <a:buChar char="o"/>
-            </a:pPr>
-            <a:r>
-              <a:rPr lang="it-IT" sz="1900" kern="100" dirty="0">
-                <a:cs typeface="Arial" panose="020B0604020202020204" pitchFamily="34" charset="0"/>
-              </a:rPr>
-              <a:t>Successivamente si analizzano di pari passo i pixel in termini di indici di entrambe le immagini e si ricava la coppia (intensità_pixel_ref, intensità_pixel_mov). L’istogramma 2D sarà quindi una griglia le cui celle rappresentano la frequenza assoluta ossia quante volte si è manifestata tale coppia.</a:t>
-            </a:r>
-          </a:p>
-          <a:p>
-            <a:pPr marL="285750" indent="-285750">
-              <a:lnSpc>
-                <a:spcPct val="107000"/>
-              </a:lnSpc>
-              <a:spcAft>
-                <a:spcPts val="800"/>
-              </a:spcAft>
-              <a:buFont typeface="Courier New" panose="02070309020205020404" pitchFamily="49" charset="0"/>
-              <a:buChar char="o"/>
-            </a:pPr>
-            <a:r>
-              <a:rPr lang="it-IT" sz="1900" kern="100" dirty="0">
-                <a:cs typeface="Arial" panose="020B0604020202020204" pitchFamily="34" charset="0"/>
-              </a:rPr>
-              <a:t>A partire dalle frequenze assolute si calcolano quelle relative che forniscono difatti una stima della probabilità corrispondente alla coppia. Infine si calcola la Mutua Informazione.</a:t>
-            </a:r>
           </a:p>
         </p:txBody>
       </p:sp>
@@ -8075,7 +7972,7 @@
                 </a14:m>
                 <a:r>
                   <a:rPr lang="it-IT" dirty="0"/>
-                  <a:t>  quindi </a:t>
+                  <a:t>  then </a:t>
                 </a:r>
                 <a14:m>
                   <m:oMath xmlns:m="http://schemas.openxmlformats.org/officeDocument/2006/math">
@@ -8452,7 +8349,7 @@
           </a:ln>
           <a:extLst>
             <a:ext uri="{C572A759-6A51-4108-AA02-DFA0A04FC94B}">
-              <ma14:wrappingTextBoxFlag xmlns="" xmlns:m="http://schemas.openxmlformats.org/officeDocument/2006/math" xmlns:a14="http://schemas.microsoft.com/office/drawing/2010/main" xmlns:ma14="http://schemas.microsoft.com/office/mac/drawingml/2011/main" val="1"/>
+              <ma14:wrappingTextBoxFlag xmlns:ma14="http://schemas.microsoft.com/office/mac/drawingml/2011/main" xmlns:a14="http://schemas.microsoft.com/office/drawing/2010/main" xmlns:m="http://schemas.openxmlformats.org/officeDocument/2006/math" xmlns="" val="1"/>
             </a:ext>
           </a:extLst>
         </p:spPr>
@@ -8478,9 +8375,10 @@
           </a:lstStyle>
           <a:p>
             <a:r>
-              <a:rPr lang="it-IT" sz="4067" noProof="0" dirty="0"/>
-              <a:t>La procedura</a:t>
+              <a:rPr lang="it-IT" sz="4067"/>
+              <a:t>The procedure</a:t>
             </a:r>
+            <a:endParaRPr lang="it-IT" sz="4067" noProof="0" dirty="0"/>
           </a:p>
         </p:txBody>
       </p:sp>
@@ -8499,7 +8397,7 @@
         <p:spPr>
           <a:xfrm>
             <a:off x="370318" y="1301355"/>
-            <a:ext cx="11202250" cy="4780668"/>
+            <a:ext cx="11202250" cy="4764189"/>
           </a:xfrm>
           <a:prstGeom prst="rect">
             <a:avLst/>
@@ -8523,20 +8421,10 @@
               <a:buChar char="o"/>
             </a:pPr>
             <a:r>
-              <a:rPr lang="it-IT" sz="1900" kern="100" dirty="0">
+              <a:rPr lang="en-US" sz="1900" kern="100" dirty="0">
                 <a:cs typeface="Arial" panose="020B0604020202020204" pitchFamily="34" charset="0"/>
               </a:rPr>
-              <a:t>L’approccio sviluppato ha come fulcro una pipeline. Tale pipeline riceve in ingresso la coppia reference e moving, effettua la </a:t>
-            </a:r>
-            <a:r>
-              <a:rPr lang="it-IT" sz="2000" dirty="0"/>
-              <a:t>massimizzazione della MI </a:t>
-            </a:r>
-            <a:r>
-              <a:rPr lang="it-IT" sz="1900" kern="100" dirty="0">
-                <a:cs typeface="Arial" panose="020B0604020202020204" pitchFamily="34" charset="0"/>
-              </a:rPr>
-              <a:t>e restituisce un vettore di tre componenti, ogni componente rappresenta un parametro della roto-traslazione: tx, ty, theta. Da notare che la massimizzazione avviene grazie ad un ottimizzatore che sfrutta differenti metodi numerici.</a:t>
+              <a:t>The approach developed has a pipeline as its core. This pipeline receives the reference and moving pair as input, maximizes the MI and returns a vector of three components, each component representing a roto-translation parameter: tx, ty, theta. It should be noted that the maximization takes place thanks to an optimizer that uses different numerical methods.</a:t>
             </a:r>
           </a:p>
           <a:p>
@@ -8551,10 +8439,10 @@
               <a:buChar char="o"/>
             </a:pPr>
             <a:r>
-              <a:rPr lang="it-IT" sz="1900" kern="100" dirty="0">
+              <a:rPr lang="en-US" sz="1900" kern="100" dirty="0">
                 <a:cs typeface="Arial" panose="020B0604020202020204" pitchFamily="34" charset="0"/>
               </a:rPr>
-              <a:t>La pipeline è molto versatile in quanto consente di impostare il numero di bin con cui effettuare il calcolo della MI ed il metodo di ottimizzazione.</a:t>
+              <a:t>The pipeline is very versatile as it allows you to set the number of bins with which to perform the MI calculation and the optimization method.</a:t>
             </a:r>
           </a:p>
           <a:p>
@@ -8569,10 +8457,10 @@
               <a:buChar char="o"/>
             </a:pPr>
             <a:r>
-              <a:rPr lang="it-IT" sz="1900" kern="100" dirty="0">
+              <a:rPr lang="en-US" sz="1900" kern="100" dirty="0">
                 <a:cs typeface="Arial" panose="020B0604020202020204" pitchFamily="34" charset="0"/>
               </a:rPr>
-              <a:t>È stata implementata una gridsearch degli iperparametri che coinvolge tale pipeline. In particolare, il dominio di ricerca prevede che ogni iperparametro assuma uno dei seguenti valori:</a:t>
+              <a:t>A hyperparameter gridsearch has been implemented involving that pipeline. In particular, the search domain requires that each hyperparameter takes one of the following values:</a:t>
             </a:r>
           </a:p>
           <a:p>
@@ -8587,10 +8475,10 @@
               <a:buChar char="§"/>
             </a:pPr>
             <a:r>
-              <a:rPr lang="it-IT" sz="1900" kern="100" dirty="0">
+              <a:rPr lang="en-US" sz="1900" kern="100" dirty="0">
                 <a:cs typeface="Arial" panose="020B0604020202020204" pitchFamily="34" charset="0"/>
               </a:rPr>
-              <a:t>Numero di bin -&gt; (64, 128, 256)</a:t>
+              <a:t>Number of bins -&gt; (64, 128, 256)</a:t>
             </a:r>
           </a:p>
           <a:p>
@@ -8605,10 +8493,10 @@
               <a:buChar char="§"/>
             </a:pPr>
             <a:r>
-              <a:rPr lang="it-IT" sz="1900" kern="100" dirty="0">
+              <a:rPr lang="en-US" sz="1900" kern="100" dirty="0">
                 <a:cs typeface="Arial" panose="020B0604020202020204" pitchFamily="34" charset="0"/>
               </a:rPr>
-              <a:t>Metodo di ottimizzazione -&gt; (Powell, Nelder-Mead, BFGS)</a:t>
+              <a:t>Optimization method -&gt; (Powell, Nelder-Mead, BFGS)</a:t>
             </a:r>
           </a:p>
           <a:p>
@@ -8623,10 +8511,10 @@
               <a:buChar char="o"/>
             </a:pPr>
             <a:r>
-              <a:rPr lang="it-IT" sz="1900" kern="100" dirty="0">
+              <a:rPr lang="en-US" sz="1900" kern="100" dirty="0">
                 <a:cs typeface="Arial" panose="020B0604020202020204" pitchFamily="34" charset="0"/>
               </a:rPr>
-              <a:t>La gridsearch produce un file csv in cui sono presenti tutte le configurazioni. Quindi una funzione di valutazione estrae, come da specifiche, quella avente errore medio minimo.</a:t>
+              <a:t>The gridsearch produces a csv file where all the configurations are present. Then an evaluation function extracts, as per the specifications, the one with the minimum average error.</a:t>
             </a:r>
           </a:p>
           <a:p>
@@ -8641,11 +8529,14 @@
               <a:buChar char="o"/>
             </a:pPr>
             <a:r>
-              <a:rPr lang="it-IT" sz="1900" kern="100" dirty="0">
+              <a:rPr lang="en-US" sz="1900" kern="100" dirty="0">
                 <a:cs typeface="Arial" panose="020B0604020202020204" pitchFamily="34" charset="0"/>
               </a:rPr>
-              <a:t>È importante notare che per il calcolo dell’errore si è impiegata la metrica MAE.</a:t>
+              <a:t>It is important to note that the MAE metric was used to calculate the error.</a:t>
             </a:r>
+            <a:endParaRPr lang="it-IT" sz="1900" kern="100" dirty="0">
+              <a:cs typeface="Arial" panose="020B0604020202020204" pitchFamily="34" charset="0"/>
+            </a:endParaRPr>
           </a:p>
         </p:txBody>
       </p:sp>
@@ -8710,7 +8601,7 @@
           </a:ln>
           <a:extLst>
             <a:ext uri="{C572A759-6A51-4108-AA02-DFA0A04FC94B}">
-              <ma14:wrappingTextBoxFlag xmlns="" xmlns:m="http://schemas.openxmlformats.org/officeDocument/2006/math" xmlns:a14="http://schemas.microsoft.com/office/drawing/2010/main" xmlns:ma14="http://schemas.microsoft.com/office/mac/drawingml/2011/main" val="1"/>
+              <ma14:wrappingTextBoxFlag xmlns:ma14="http://schemas.microsoft.com/office/mac/drawingml/2011/main" xmlns:a14="http://schemas.microsoft.com/office/drawing/2010/main" xmlns:m="http://schemas.openxmlformats.org/officeDocument/2006/math" xmlns="" val="1"/>
             </a:ext>
           </a:extLst>
         </p:spPr>
@@ -8736,8 +8627,8 @@
           </a:lstStyle>
           <a:p>
             <a:r>
-              <a:rPr lang="it-IT" sz="4067" dirty="0"/>
-              <a:t>Primi tentativi</a:t>
+              <a:rPr lang="it-IT" sz="4067"/>
+              <a:t>First attempts</a:t>
             </a:r>
             <a:endParaRPr lang="it-IT" sz="4067" noProof="0" dirty="0"/>
           </a:p>
@@ -8782,71 +8673,17 @@
               <a:buChar char="o"/>
             </a:pPr>
             <a:r>
-              <a:rPr lang="it-IT" sz="1900" kern="100" dirty="0">
+              <a:rPr lang="en-US" sz="1900" kern="100">
                 <a:cs typeface="Arial" panose="020B0604020202020204" pitchFamily="34" charset="0"/>
               </a:rPr>
-              <a:t>Le prime versioni del codice svolgevano una gridsearch completa sia per trovare i migliori metodi di ottimizzazione che il miglior numero di bin. Questo perché non sapendo niente a priori, si è voluto testare in maniera grossolana le performance raggiunte.</a:t>
+              <a:t>Early versions of the code performed a comprehensive gridsearch to find both the best optimization methods and the best number of bins. This is because not knowing anything a priori, we wanted to test the performance achieved in a rough way.
+The first problem was the presence of null probability values. Depending on the number of bins used, some cells have zero occurrences. This is because there are so many pairs of possible intensities. In this case, it was enough to apply a mask that considers only cells with positive values. 
+The second problem was balancing the histogram. This is because, as a result of the T transformation, some pixels in the image are mapped outside the frame. For areas that remain "empty", OpenCV automatically assigns a zero intensity value. This causes a high increase in occurrences in which these black pixels are involved, thus making a greater contribution to these areas of absence of the image. In this case, we have considered a mask, having all white pixels, to which the T transformation is applied. So we consider only the positions of the white pixels following the transformation for the calculation of the histogram. This interpretation is the result of the work carried out by [2].
+From the first results, the supremacy of the Powell method is evident, it was decided to proceed with its use because with the default configuration it produces results with satisfactory goodness.</a:t>
             </a:r>
-          </a:p>
-          <a:p>
-            <a:pPr marL="285750" indent="-285750">
-              <a:lnSpc>
-                <a:spcPct val="107000"/>
-              </a:lnSpc>
-              <a:spcAft>
-                <a:spcPts val="800"/>
-              </a:spcAft>
-              <a:buFont typeface="Courier New" panose="02070309020205020404" pitchFamily="49" charset="0"/>
-              <a:buChar char="o"/>
-            </a:pPr>
-            <a:r>
-              <a:rPr lang="it-IT" sz="1900" kern="100" dirty="0">
-                <a:cs typeface="Arial" panose="020B0604020202020204" pitchFamily="34" charset="0"/>
-              </a:rPr>
-              <a:t>Il primo problema è stata la presenza di valori nulli di probabilità . In base al numero di bin impiegato, alcune celle risultano con zero occorrenze. Questo perché vi sono tante coppie di intensità possibili. In questo caso è bastato applicare una maschera che considera solo le celle con valori positivi. </a:t>
-            </a:r>
-          </a:p>
-          <a:p>
-            <a:pPr marL="285750" indent="-285750">
-              <a:lnSpc>
-                <a:spcPct val="107000"/>
-              </a:lnSpc>
-              <a:spcAft>
-                <a:spcPts val="800"/>
-              </a:spcAft>
-              <a:buFont typeface="Courier New" panose="02070309020205020404" pitchFamily="49" charset="0"/>
-              <a:buChar char="o"/>
-            </a:pPr>
-            <a:r>
-              <a:rPr lang="it-IT" sz="1900" kern="100" dirty="0">
-                <a:cs typeface="Arial" panose="020B0604020202020204" pitchFamily="34" charset="0"/>
-              </a:rPr>
-              <a:t>Il secondo problema è stato bilanciare l’istogramma. Questo perché, a seguito della trasformazione T, alcuni pixel dell’immagine vengono mappati al di fuori del frame. Per le zone rimaste «vuote», OpenCV assegna automaticamente un valore di intensità nullo. Ciò causa un elevato aumento delle occorrenze in cui sono coinvolti questi pixel neri, dando quindi maggior contribuito a queste zone di assenza dell’immagine. In questo caso si è considerata una maschera, avente pixel tutti bianchi, a cui si applica la trasformazione T. Quindi si considerano solo le posizioni dei pixel bianchi a seguito della trasformazione per il calcolo dell’istogramma. Questa interpretazione è frutto del lavoro svolto da [2].</a:t>
-            </a:r>
-          </a:p>
-          <a:p>
-            <a:pPr marL="285750" indent="-285750">
-              <a:lnSpc>
-                <a:spcPct val="107000"/>
-              </a:lnSpc>
-              <a:spcAft>
-                <a:spcPts val="800"/>
-              </a:spcAft>
-              <a:buFont typeface="Courier New" panose="02070309020205020404" pitchFamily="49" charset="0"/>
-              <a:buChar char="o"/>
-            </a:pPr>
-            <a:r>
-              <a:rPr lang="it-IT" sz="1900" kern="100" noProof="0" dirty="0">
-                <a:cs typeface="Arial" panose="020B0604020202020204" pitchFamily="34" charset="0"/>
-              </a:rPr>
-              <a:t>Dai primi risultati</a:t>
-            </a:r>
-            <a:r>
-              <a:rPr lang="it-IT" sz="1900" kern="100" dirty="0">
-                <a:cs typeface="Arial" panose="020B0604020202020204" pitchFamily="34" charset="0"/>
-              </a:rPr>
-              <a:t> appare evidente la supremazia del metodo Powell, si è scelto di procedere con il suo utilizzo poiché con la configurazione di default produce risultati con una bontà soddisfacente.</a:t>
-            </a:r>
+            <a:endParaRPr lang="it-IT" sz="1900" kern="100" dirty="0">
+              <a:cs typeface="Arial" panose="020B0604020202020204" pitchFamily="34" charset="0"/>
+            </a:endParaRPr>
           </a:p>
         </p:txBody>
       </p:sp>
@@ -8911,7 +8748,7 @@
           </a:ln>
           <a:extLst>
             <a:ext uri="{C572A759-6A51-4108-AA02-DFA0A04FC94B}">
-              <ma14:wrappingTextBoxFlag xmlns="" xmlns:m="http://schemas.openxmlformats.org/officeDocument/2006/math" xmlns:a14="http://schemas.microsoft.com/office/drawing/2010/main" xmlns:ma14="http://schemas.microsoft.com/office/mac/drawingml/2011/main" val="1"/>
+              <ma14:wrappingTextBoxFlag xmlns:ma14="http://schemas.microsoft.com/office/mac/drawingml/2011/main" xmlns:a14="http://schemas.microsoft.com/office/drawing/2010/main" xmlns:m="http://schemas.openxmlformats.org/officeDocument/2006/math" xmlns="" val="1"/>
             </a:ext>
           </a:extLst>
         </p:spPr>
@@ -8937,8 +8774,8 @@
           </a:lstStyle>
           <a:p>
             <a:r>
-              <a:rPr lang="it-IT" sz="4067" dirty="0"/>
-              <a:t>Matrice T e Preprocessing</a:t>
+              <a:rPr lang="it-IT" sz="4067"/>
+              <a:t>T-Matrix and Preprocessing</a:t>
             </a:r>
             <a:endParaRPr lang="it-IT" sz="4067" noProof="0" dirty="0"/>
           </a:p>
@@ -8959,7 +8796,7 @@
         <p:spPr>
           <a:xfrm>
             <a:off x="389369" y="1909061"/>
-            <a:ext cx="11546992" cy="3728136"/>
+            <a:ext cx="11546992" cy="3312702"/>
           </a:xfrm>
           <a:prstGeom prst="rect">
             <a:avLst/>
@@ -8983,43 +8820,11 @@
               <a:buChar char="o"/>
             </a:pPr>
             <a:r>
-              <a:rPr lang="it-IT" sz="1900" kern="100" dirty="0">
+              <a:rPr lang="en-US" sz="1900" kern="100">
                 <a:cs typeface="Arial" panose="020B0604020202020204" pitchFamily="34" charset="0"/>
               </a:rPr>
-              <a:t>Inizialmente la trasformazione T agiva avendo come riferimento di rotazione il punto in alto a sinistra dell’immagine. Questo perché così vi era una diretta corrispondenza con il GT, quindi per poter calcolare l’errore e confrontare i risultati immediatamente. Tuttavia, secondo quanto ottenuto in [3], si sono notati miglioramenti significativi se come riferimento si considera il centro dell’immagine. </a:t>
-            </a:r>
-          </a:p>
-          <a:p>
-            <a:pPr marL="285750" indent="-285750">
-              <a:lnSpc>
-                <a:spcPct val="107000"/>
-              </a:lnSpc>
-              <a:spcAft>
-                <a:spcPts val="800"/>
-              </a:spcAft>
-              <a:buFont typeface="Courier New" panose="02070309020205020404" pitchFamily="49" charset="0"/>
-              <a:buChar char="o"/>
-            </a:pPr>
-            <a:endParaRPr lang="it-IT" sz="1900" kern="100" dirty="0">
-              <a:cs typeface="Arial" panose="020B0604020202020204" pitchFamily="34" charset="0"/>
-            </a:endParaRPr>
-          </a:p>
-          <a:p>
-            <a:pPr marL="285750" indent="-285750">
-              <a:lnSpc>
-                <a:spcPct val="107000"/>
-              </a:lnSpc>
-              <a:spcAft>
-                <a:spcPts val="800"/>
-              </a:spcAft>
-              <a:buFont typeface="Courier New" panose="02070309020205020404" pitchFamily="49" charset="0"/>
-              <a:buChar char="o"/>
-            </a:pPr>
-            <a:r>
-              <a:rPr lang="it-IT" sz="1900" kern="100" dirty="0">
-                <a:cs typeface="Arial" panose="020B0604020202020204" pitchFamily="34" charset="0"/>
-              </a:rPr>
-              <a:t>Si sono utilizzate diverse strategie di preprocessing al fine di far emergere caratteristiche distintive. Le più semplici sono state convertire in scala di grigi e sfruttare il canale Value dello spazio di colore HSV. Un’ulteriore tecnica è stata applicare la PCA: difatti ogni punto dell’immagine è inizialmente un vettore di tre componenti (BGR), quindi si può ricavare la direzione di massima varianza di tali punti ed associare come valore di intensità ad ogni punto il valore della proiezione lungo tale direzione. Tali strategie sono state usate in maniera combinata anche con un successivo blurring Gaussiano, provando diversi kernel.</a:t>
+              <a:t>Initially, the T transformation worked with the upper left point of the image as a rotation reference. This is because there was a direct correspondence with the GT, so that the error could be calculated and the results compared immediately. However, according to what was obtained in [3], significant improvements have been noted if the center of the image is taken as a reference. 
+Different preprocessing strategies were used in order to bring out distinctive characteristics. The simplest were to convert to grayscale and take advantage of the Value channel of the HSV color space. A further technique was to apply PCA: in fact, each point of the image is initially a vector of three components (BGR), so the direction of maximum variance of these points can be obtained and the value of the projection along that direction can be associated as an intensity value to each point. These strategies were also used in combination with a subsequent Gaussian blurring, trying different kernels.</a:t>
             </a:r>
             <a:endParaRPr lang="it-IT" sz="1900" kern="100" noProof="0" dirty="0">
               <a:cs typeface="Arial" panose="020B0604020202020204" pitchFamily="34" charset="0"/>
@@ -9088,7 +8893,7 @@
           </a:ln>
           <a:extLst>
             <a:ext uri="{C572A759-6A51-4108-AA02-DFA0A04FC94B}">
-              <ma14:wrappingTextBoxFlag xmlns="" xmlns:m="http://schemas.openxmlformats.org/officeDocument/2006/math" xmlns:a14="http://schemas.microsoft.com/office/drawing/2010/main" xmlns:ma14="http://schemas.microsoft.com/office/mac/drawingml/2011/main" val="1"/>
+              <ma14:wrappingTextBoxFlag xmlns:ma14="http://schemas.microsoft.com/office/mac/drawingml/2011/main" xmlns:a14="http://schemas.microsoft.com/office/drawing/2010/main" xmlns:m="http://schemas.openxmlformats.org/officeDocument/2006/math" xmlns="" val="1"/>
             </a:ext>
           </a:extLst>
         </p:spPr>
@@ -9114,8 +8919,8 @@
           </a:lstStyle>
           <a:p>
             <a:r>
-              <a:rPr lang="it-IT" sz="4067" dirty="0"/>
-              <a:t>Spunti scientifici</a:t>
+              <a:rPr lang="it-IT" sz="4067"/>
+              <a:t>Scientific insights</a:t>
             </a:r>
             <a:endParaRPr lang="it-IT" sz="4067" noProof="0" dirty="0"/>
           </a:p>
@@ -9160,124 +8965,18 @@
               <a:buChar char="o"/>
             </a:pPr>
             <a:r>
-              <a:rPr lang="it-IT" sz="1900" b="0" i="0" kern="100" noProof="0" dirty="0">
+              <a:rPr lang="en-US" sz="1900" kern="100">
                 <a:cs typeface="Arial" panose="020B0604020202020204" pitchFamily="34" charset="0"/>
               </a:rPr>
-              <a:t>Una volta definita la struttura</a:t>
+              <a:t>Once the structure of the code and the method of evaluation of the pipeline were defined, it was decided to search the literature for contributions that could provide both ideas and methodologies.
+The mere use of the Powell method has prompted the approach in an attempt to use the other proposed optimization methods as well. Several attempts have been made with BFGS, however no great results have been achieved in accordance with what has been obtained in [4].
+The Nelder–Mead method was implemented as suggested by [4] and, without going into too much detail, the same simplex configuration was employed. Note that the paper specifies the simplex parameters related to translations with units of measurement in millimeters. However, although the units of measurement do not match those adopted (pixels), applying these initializations still results are rather satisfactory.
+So with Nelder-Mead better performances were achieved than with Powell. It has also been discovered that it is possible to set the Nelder–Mead method with an adaptive variant as reported in [5], just add a flag. However, it was not advantageous to do so.
+According to [4], the vector of the parameters of the transformation T (tx, ty, theta), can be initialized as (0, 0, 5°). However, better performance was achieved with initialization (0, 0, 0).</a:t>
             </a:r>
-            <a:r>
-              <a:rPr lang="it-IT" sz="1900" kern="100" dirty="0">
-                <a:cs typeface="Arial" panose="020B0604020202020204" pitchFamily="34" charset="0"/>
-              </a:rPr>
-              <a:t> del codice e la modalità di valutazione della pipeline, si è deciso di ricercare in letteratura dei contributi che potessero fornire sia degli spunti sia delle metodologie.</a:t>
-            </a:r>
-          </a:p>
-          <a:p>
-            <a:pPr marL="285750" indent="-285750">
-              <a:lnSpc>
-                <a:spcPct val="107000"/>
-              </a:lnSpc>
-              <a:spcAft>
-                <a:spcPts val="800"/>
-              </a:spcAft>
-              <a:buFont typeface="Courier New" panose="02070309020205020404" pitchFamily="49" charset="0"/>
-              <a:buChar char="o"/>
-            </a:pPr>
-            <a:r>
-              <a:rPr lang="it-IT" sz="1900" kern="100" noProof="0" dirty="0">
-                <a:cs typeface="Arial" panose="020B0604020202020204" pitchFamily="34" charset="0"/>
-              </a:rPr>
-              <a:t>Il solo impiego del metodo Powell ha spinto l’approccio nel tentativo di usare anche gli altri metodi di ottimizzazione proposti. Sono stati svolti </a:t>
-            </a:r>
-            <a:r>
-              <a:rPr lang="it-IT" sz="1900" kern="100" dirty="0">
-                <a:cs typeface="Arial" panose="020B0604020202020204" pitchFamily="34" charset="0"/>
-              </a:rPr>
-              <a:t>diversi tentativi con BFGS, tuttavia non sono stati raggiunti grandi risultati in accordo con quanto ottenuto in [4].</a:t>
-            </a:r>
-          </a:p>
-          <a:p>
-            <a:pPr marL="285750" indent="-285750">
-              <a:lnSpc>
-                <a:spcPct val="107000"/>
-              </a:lnSpc>
-              <a:spcAft>
-                <a:spcPts val="800"/>
-              </a:spcAft>
-              <a:buFont typeface="Courier New" panose="02070309020205020404" pitchFamily="49" charset="0"/>
-              <a:buChar char="o"/>
-            </a:pPr>
-            <a:r>
-              <a:rPr lang="it-IT" sz="1900" kern="100" dirty="0">
-                <a:cs typeface="Arial" panose="020B0604020202020204" pitchFamily="34" charset="0"/>
-              </a:rPr>
-              <a:t>Il metodo Nelder–Mead è stato implementato come suggerito da [4] e, senza scendere troppo nei dettagli, si è impiegata la stessa configurazione del simplesso. Da notare che il paper specifica i parametri del simplesso relativi alle traslazioni con unità di misura in millimetri. Tuttavia nonostante le unità di misura non combacino con quelle adottate (pixel),  applicando ugualmente tali inizializzazioni si ottengono risultati piuttosto soddisfacenti.</a:t>
-            </a:r>
-          </a:p>
-          <a:p>
-            <a:pPr marL="285750" indent="-285750">
-              <a:lnSpc>
-                <a:spcPct val="107000"/>
-              </a:lnSpc>
-              <a:spcAft>
-                <a:spcPts val="800"/>
-              </a:spcAft>
-              <a:buFont typeface="Courier New" panose="02070309020205020404" pitchFamily="49" charset="0"/>
-              <a:buChar char="o"/>
-            </a:pPr>
-            <a:r>
-              <a:rPr lang="it-IT" sz="1900" kern="100" dirty="0">
-                <a:cs typeface="Arial" panose="020B0604020202020204" pitchFamily="34" charset="0"/>
-              </a:rPr>
-              <a:t>Quindi con Nelder–Mead sono state raggiunte performance migliori rispetto a Powell. Inoltre si è scoperto che è possibile impostare il metodo Nelder–Mead con una variante adattiva secondo quanto riportano in [5], basta aggiungere una flag. Tuttavia non è risultato vantaggioso farlo.</a:t>
-            </a:r>
-          </a:p>
-          <a:p>
-            <a:pPr marL="285750" indent="-285750">
-              <a:lnSpc>
-                <a:spcPct val="107000"/>
-              </a:lnSpc>
-              <a:spcAft>
-                <a:spcPts val="800"/>
-              </a:spcAft>
-              <a:buFont typeface="Courier New" panose="02070309020205020404" pitchFamily="49" charset="0"/>
-              <a:buChar char="o"/>
-            </a:pPr>
-            <a:r>
-              <a:rPr lang="it-IT" sz="1900" kern="100" dirty="0">
-                <a:cs typeface="Arial" panose="020B0604020202020204" pitchFamily="34" charset="0"/>
-              </a:rPr>
-              <a:t>Secondo [4], il</a:t>
-            </a:r>
-            <a:r>
-              <a:rPr lang="it-IT" sz="1900" kern="100" noProof="0" dirty="0">
-                <a:cs typeface="Arial" panose="020B0604020202020204" pitchFamily="34" charset="0"/>
-              </a:rPr>
-              <a:t> vettore dei parametri della trasformazione T ossia (tx, ty, theta), </a:t>
-            </a:r>
-            <a:r>
-              <a:rPr lang="it-IT" sz="1900" kern="100" dirty="0">
-                <a:cs typeface="Arial" panose="020B0604020202020204" pitchFamily="34" charset="0"/>
-              </a:rPr>
-              <a:t>si può </a:t>
-            </a:r>
-            <a:r>
-              <a:rPr lang="it-IT" sz="1900" kern="100" noProof="0" dirty="0">
-                <a:cs typeface="Arial" panose="020B0604020202020204" pitchFamily="34" charset="0"/>
-              </a:rPr>
-              <a:t>inizializzare </a:t>
-            </a:r>
-            <a:br>
-              <a:rPr lang="it-IT" sz="1900" kern="100" noProof="0" dirty="0">
-                <a:cs typeface="Arial" panose="020B0604020202020204" pitchFamily="34" charset="0"/>
-              </a:rPr>
-            </a:br>
-            <a:r>
-              <a:rPr lang="it-IT" sz="1900" kern="100" noProof="0" dirty="0">
-                <a:cs typeface="Arial" panose="020B0604020202020204" pitchFamily="34" charset="0"/>
-              </a:rPr>
-              <a:t>come (0, 0, 5°). Tuttavia, sono state raggiunte performance migliori con l’inizializzazione (0, 0, 0).</a:t>
-            </a:r>
+            <a:endParaRPr lang="it-IT" sz="1900" kern="100" noProof="0" dirty="0">
+              <a:cs typeface="Arial" panose="020B0604020202020204" pitchFamily="34" charset="0"/>
+            </a:endParaRPr>
           </a:p>
         </p:txBody>
       </p:sp>
@@ -9332,7 +9031,7 @@
         <p:spPr>
           <a:xfrm>
             <a:off x="370317" y="214619"/>
-            <a:ext cx="7072701" cy="578941"/>
+            <a:ext cx="7638219" cy="578941"/>
           </a:xfrm>
           <a:prstGeom prst="rect">
             <a:avLst/>
@@ -9342,7 +9041,7 @@
           </a:ln>
           <a:extLst>
             <a:ext uri="{C572A759-6A51-4108-AA02-DFA0A04FC94B}">
-              <ma14:wrappingTextBoxFlag xmlns="" xmlns:m="http://schemas.openxmlformats.org/officeDocument/2006/math" xmlns:a14="http://schemas.microsoft.com/office/drawing/2010/main" xmlns:ma14="http://schemas.microsoft.com/office/mac/drawingml/2011/main" val="1"/>
+              <ma14:wrappingTextBoxFlag xmlns:ma14="http://schemas.microsoft.com/office/mac/drawingml/2011/main" xmlns:a14="http://schemas.microsoft.com/office/drawing/2010/main" xmlns:m="http://schemas.openxmlformats.org/officeDocument/2006/math" xmlns="" val="1"/>
             </a:ext>
           </a:extLst>
         </p:spPr>
@@ -9368,8 +9067,8 @@
           </a:lstStyle>
           <a:p>
             <a:r>
-              <a:rPr lang="it-IT" sz="4067" dirty="0"/>
-              <a:t>Risultati ottenuti sul val set</a:t>
+              <a:rPr lang="en-US" sz="4067" dirty="0"/>
+              <a:t>Results obtained on the val set</a:t>
             </a:r>
             <a:endParaRPr lang="it-IT" sz="4067" noProof="0" dirty="0"/>
           </a:p>
@@ -9412,16 +9111,10 @@
               </a:spcAft>
             </a:pPr>
             <a:r>
-              <a:rPr lang="it-IT" sz="1900" kern="100" noProof="0" dirty="0">
+              <a:rPr lang="en-US" sz="1900" kern="100">
                 <a:cs typeface="Arial" panose="020B0604020202020204" pitchFamily="34" charset="0"/>
               </a:rPr>
-              <a:t>L’unit</a:t>
-            </a:r>
-            <a:r>
-              <a:rPr lang="it-IT" sz="1900" kern="100" dirty="0">
-                <a:cs typeface="Arial" panose="020B0604020202020204" pitchFamily="34" charset="0"/>
-              </a:rPr>
-              <a:t>à di misura è pixel per tx e ty, mentre radianti per theta.</a:t>
+              <a:t>The unit of measurement is pixels for tx and ty, while radians for theta.</a:t>
             </a:r>
             <a:endParaRPr lang="it-IT" sz="1900" kern="100" noProof="0" dirty="0">
               <a:cs typeface="Arial" panose="020B0604020202020204" pitchFamily="34" charset="0"/>
@@ -11795,11 +11488,14 @@
               </a:spcAft>
             </a:pPr>
             <a:r>
-              <a:rPr lang="it-IT" kern="100" noProof="0" dirty="0">
+              <a:rPr lang="en-US" kern="100">
                 <a:cs typeface="Arial" panose="020B0604020202020204" pitchFamily="34" charset="0"/>
               </a:rPr>
-              <a:t>configurazione migliore, in quanto l’unica presente nei top migliori di entrambi i gruppi </a:t>
+              <a:t>better configuration, as it is the only one present in the best tops of both groups</a:t>
             </a:r>
+            <a:endParaRPr lang="it-IT" kern="100" noProof="0" dirty="0">
+              <a:cs typeface="Arial" panose="020B0604020202020204" pitchFamily="34" charset="0"/>
+            </a:endParaRPr>
           </a:p>
         </p:txBody>
       </p:sp>
@@ -14169,11 +13865,14 @@
               </a:spcAft>
             </a:pPr>
             <a:r>
-              <a:rPr lang="it-IT" kern="100" noProof="0" dirty="0">
+              <a:rPr lang="en-US" kern="100">
                 <a:cs typeface="Arial" panose="020B0604020202020204" pitchFamily="34" charset="0"/>
               </a:rPr>
-              <a:t>Configurazioni ordinate con priorità rispetto all’errore di traslazione, calcolato combinando ascisse ed ordinate.</a:t>
+              <a:t>Ordered configurations with priority over translation error, calculated by combining x-axis and ordinate.</a:t>
             </a:r>
+            <a:endParaRPr lang="it-IT" kern="100" noProof="0" dirty="0">
+              <a:cs typeface="Arial" panose="020B0604020202020204" pitchFamily="34" charset="0"/>
+            </a:endParaRPr>
           </a:p>
         </p:txBody>
       </p:sp>
@@ -14481,7 +14180,7 @@
           </a:ln>
           <a:extLst>
             <a:ext uri="{C572A759-6A51-4108-AA02-DFA0A04FC94B}">
-              <ma14:wrappingTextBoxFlag xmlns="" xmlns:m="http://schemas.openxmlformats.org/officeDocument/2006/math" xmlns:a14="http://schemas.microsoft.com/office/drawing/2010/main" xmlns:ma14="http://schemas.microsoft.com/office/mac/drawingml/2011/main" val="1"/>
+              <ma14:wrappingTextBoxFlag xmlns:ma14="http://schemas.microsoft.com/office/mac/drawingml/2011/main" xmlns:a14="http://schemas.microsoft.com/office/drawing/2010/main" xmlns:m="http://schemas.openxmlformats.org/officeDocument/2006/math" xmlns="" val="1"/>
             </a:ext>
           </a:extLst>
         </p:spPr>
@@ -14507,8 +14206,8 @@
           </a:lstStyle>
           <a:p>
             <a:r>
-              <a:rPr lang="it-IT" sz="4067" dirty="0"/>
-              <a:t>Alcuni risultati qualitativi sul val set</a:t>
+              <a:rPr lang="en-US" sz="4067"/>
+              <a:t>Some qualitative results on the val set</a:t>
             </a:r>
             <a:endParaRPr lang="it-IT" sz="4067" noProof="0" dirty="0"/>
           </a:p>
@@ -14557,7 +14256,7 @@
                 </a:solidFill>
                 <a:cs typeface="Arial" panose="020B0604020202020204" pitchFamily="34" charset="0"/>
               </a:rPr>
-              <a:t>Coppia: c3, Preprocessing: hsv_v, Metodo: Powell, Bins: 256</a:t>
+              <a:t>Pair: c3, Preprocessing: hsv_v, Method: Powell, Bins: 256</a:t>
             </a:r>
             <a:endParaRPr lang="it-IT" sz="1400" kern="100" noProof="0" dirty="0">
               <a:solidFill>
@@ -14611,7 +14310,7 @@
                 </a:solidFill>
                 <a:cs typeface="Arial" panose="020B0604020202020204" pitchFamily="34" charset="0"/>
               </a:rPr>
-              <a:t>Coppia: c3, Preprocessing: gray-gauss-5, Metodo: Nelder-Mead, Bins: 128</a:t>
+              <a:t>Pair: c3, Preprocessing: gray-gauss-5, Method: Nelder-Mead, Bins: 128</a:t>
             </a:r>
             <a:endParaRPr lang="it-IT" sz="1400" kern="100" noProof="0" dirty="0">
               <a:solidFill>
@@ -14665,7 +14364,7 @@
                 </a:solidFill>
                 <a:cs typeface="Arial" panose="020B0604020202020204" pitchFamily="34" charset="0"/>
               </a:rPr>
-              <a:t>Coppia: c3, Preprocessing: pca-gauss-5, Metodo: Nelder-Mead, Bins: 64</a:t>
+              <a:t>Pair: c3, Preprocessing: pca-gauss-5, Method: Nelder-Mead, Bins: 64</a:t>
             </a:r>
             <a:endParaRPr lang="it-IT" sz="1400" kern="100" noProof="0" dirty="0">
               <a:solidFill>
@@ -14809,7 +14508,7 @@
           </a:ln>
           <a:extLst>
             <a:ext uri="{C572A759-6A51-4108-AA02-DFA0A04FC94B}">
-              <ma14:wrappingTextBoxFlag xmlns="" xmlns:m="http://schemas.openxmlformats.org/officeDocument/2006/math" xmlns:a14="http://schemas.microsoft.com/office/drawing/2010/main" xmlns:ma14="http://schemas.microsoft.com/office/mac/drawingml/2011/main" val="1"/>
+              <ma14:wrappingTextBoxFlag xmlns:ma14="http://schemas.microsoft.com/office/mac/drawingml/2011/main" xmlns:a14="http://schemas.microsoft.com/office/drawing/2010/main" xmlns:m="http://schemas.openxmlformats.org/officeDocument/2006/math" xmlns="" val="1"/>
             </a:ext>
           </a:extLst>
         </p:spPr>
@@ -14835,8 +14534,8 @@
           </a:lstStyle>
           <a:p>
             <a:r>
-              <a:rPr lang="it-IT" sz="4067" dirty="0"/>
-              <a:t>Andamento MI</a:t>
+              <a:rPr lang="it-IT" sz="4067"/>
+              <a:t>MI trend</a:t>
             </a:r>
             <a:endParaRPr lang="it-IT" sz="4067" noProof="0" dirty="0"/>
           </a:p>
@@ -14879,22 +14578,10 @@
               </a:spcAft>
             </a:pPr>
             <a:r>
-              <a:rPr lang="it-IT" sz="1400" kern="100" noProof="0" dirty="0">
+              <a:rPr lang="en-US" sz="1400" kern="100">
                 <a:cs typeface="Arial" panose="020B0604020202020204" pitchFamily="34" charset="0"/>
               </a:rPr>
-              <a:t>Andamento della MI</a:t>
-            </a:r>
-            <a:r>
-              <a:rPr lang="it-IT" sz="1400" kern="100" dirty="0">
-                <a:cs typeface="Arial" panose="020B0604020202020204" pitchFamily="34" charset="0"/>
-              </a:rPr>
-              <a:t> per la coppia c3 del val set</a:t>
-            </a:r>
-            <a:r>
-              <a:rPr lang="en-US" sz="1400" kern="100" dirty="0">
-                <a:cs typeface="Arial" panose="020B0604020202020204" pitchFamily="34" charset="0"/>
-              </a:rPr>
-              <a:t>, Preprocessing: pca-gauss-5, Metodo: Nelder-Mead, Bins: 64</a:t>
+              <a:t>Trend of the E for the c3 pair of the val set, Preprocessing: pca-gauss-5, Method: Nelder-Mead, Bins: 64</a:t>
             </a:r>
             <a:endParaRPr lang="it-IT" sz="1400" kern="100" dirty="0">
               <a:cs typeface="Arial" panose="020B0604020202020204" pitchFamily="34" charset="0"/>
@@ -14939,16 +14626,10 @@
               </a:spcAft>
             </a:pPr>
             <a:r>
-              <a:rPr lang="it-IT" sz="1400" kern="100" dirty="0">
+              <a:rPr lang="en-US" sz="1400" kern="100">
                 <a:cs typeface="Arial" panose="020B0604020202020204" pitchFamily="34" charset="0"/>
               </a:rPr>
-              <a:t>Andamento della MI per la coppia c6 del val set</a:t>
-            </a:r>
-            <a:r>
-              <a:rPr lang="en-US" sz="1400" kern="100" dirty="0">
-                <a:cs typeface="Arial" panose="020B0604020202020204" pitchFamily="34" charset="0"/>
-              </a:rPr>
-              <a:t>, Preprocessing: pca-gauss-5, Metodo: Nelder-Mead, Bins: 64</a:t>
+              <a:t>Trend of the E for the c6 pair of the val set, Preprocessing: pca-gauss-5, Method: Nelder-Mead, Bins: 64</a:t>
             </a:r>
             <a:endParaRPr lang="it-IT" sz="1400" kern="100" dirty="0">
               <a:cs typeface="Arial" panose="020B0604020202020204" pitchFamily="34" charset="0"/>
